--- a/examples/recreations/20_Dropbox_Recreation__ExampleItinerary/out_mat2ppt.pptx
+++ b/examples/recreations/20_Dropbox_Recreation__ExampleItinerary/out_mat2ppt.pptx
@@ -3089,9 +3089,46 @@
         <p:nvPr/>
       </p:nvGrpSpPr>
       <p:grpSpPr/>
+      <p:sp>
+        <p:nvSpPr>
+          <p:cNvPr id="2" name="Rectangle 1"/>
+          <p:cNvSpPr/>
+          <p:nvPr/>
+        </p:nvSpPr>
+        <p:spPr>
+          <a:xfrm>
+            <a:off x="457200" y="274638"/>
+            <a:ext cx="8229600" cy="1143000"/>
+          </a:xfrm>
+          <a:prstGeom prst="rect">
+            <a:avLst/>
+          </a:prstGeom>
+        </p:spPr>
+        <p:style>
+          <a:lnRef idx="1">
+            <a:schemeClr val="accent1"/>
+          </a:lnRef>
+          <a:fillRef idx="3">
+            <a:schemeClr val="accent1"/>
+          </a:fillRef>
+          <a:effectRef idx="2">
+            <a:schemeClr val="accent1"/>
+          </a:effectRef>
+          <a:fontRef idx="minor">
+            <a:schemeClr val="lt1"/>
+          </a:fontRef>
+        </p:style>
+        <p:txBody>
+          <a:bodyPr rtlCol="0" anchor="ctr"/>
+          <a:lstStyle/>
+          <a:p>
+            <a:pPr algn="ctr"/>
+          </a:p>
+        </p:txBody>
+      </p:sp>
       <p:pic>
         <p:nvPicPr>
-          <p:cNvPr id="2" name="Picture 1" descr="image1.jpeg"/>
+          <p:cNvPr id="3" name="Picture 2" descr="image1.jpeg"/>
           <p:cNvPicPr>
             <a:picLocks noChangeAspect="1"/>
           </p:cNvPicPr>
@@ -3131,9 +3168,46 @@
         <p:nvPr/>
       </p:nvGrpSpPr>
       <p:grpSpPr/>
+      <p:sp>
+        <p:nvSpPr>
+          <p:cNvPr id="2" name="Rectangle 1"/>
+          <p:cNvSpPr/>
+          <p:nvPr/>
+        </p:nvSpPr>
+        <p:spPr>
+          <a:xfrm>
+            <a:off x="457200" y="274638"/>
+            <a:ext cx="8229600" cy="1143000"/>
+          </a:xfrm>
+          <a:prstGeom prst="rect">
+            <a:avLst/>
+          </a:prstGeom>
+        </p:spPr>
+        <p:style>
+          <a:lnRef idx="1">
+            <a:schemeClr val="accent1"/>
+          </a:lnRef>
+          <a:fillRef idx="3">
+            <a:schemeClr val="accent1"/>
+          </a:fillRef>
+          <a:effectRef idx="2">
+            <a:schemeClr val="accent1"/>
+          </a:effectRef>
+          <a:fontRef idx="minor">
+            <a:schemeClr val="lt1"/>
+          </a:fontRef>
+        </p:style>
+        <p:txBody>
+          <a:bodyPr rtlCol="0" anchor="ctr"/>
+          <a:lstStyle/>
+          <a:p>
+            <a:pPr algn="ctr"/>
+          </a:p>
+        </p:txBody>
+      </p:sp>
       <p:pic>
         <p:nvPicPr>
-          <p:cNvPr id="2" name="Picture 1" descr="image1.jpeg"/>
+          <p:cNvPr id="3" name="Picture 2" descr="image1.jpeg"/>
           <p:cNvPicPr>
             <a:picLocks noChangeAspect="1"/>
           </p:cNvPicPr>
@@ -3157,7 +3231,7 @@
       </p:pic>
       <p:pic>
         <p:nvPicPr>
-          <p:cNvPr id="3" name="Picture 2" descr="image1.jpeg"/>
+          <p:cNvPr id="4" name="Picture 3" descr="image1.jpeg"/>
           <p:cNvPicPr>
             <a:picLocks noChangeAspect="1"/>
           </p:cNvPicPr>

--- a/examples/recreations/20_Dropbox_Recreation__ExampleItinerary/out_mat2ppt.pptx
+++ b/examples/recreations/20_Dropbox_Recreation__ExampleItinerary/out_mat2ppt.pptx
@@ -1,12 +1,15 @@
 
 <file path=ppt/presentation.xml><?xml version="1.0" encoding="utf-8"?>
-<p:presentation xmlns:a="http://schemas.openxmlformats.org/drawingml/2006/main" xmlns:r="http://schemas.openxmlformats.org/officeDocument/2006/relationships" xmlns:p="http://schemas.openxmlformats.org/presentationml/2006/main" saveSubsetFonts="1" autoCompressPictures="0">
+<p:presentation xmlns:a="http://schemas.openxmlformats.org/drawingml/2006/main" xmlns:r="http://schemas.openxmlformats.org/officeDocument/2006/relationships" xmlns:p="http://schemas.openxmlformats.org/presentationml/2006/main" saveSubsetFonts="1">
   <p:sldMasterIdLst>
     <p:sldMasterId id="2147483648" r:id="rId1"/>
   </p:sldMasterIdLst>
+  <p:notesMasterIdLst>
+    <p:notesMasterId r:id="rId4"/>
+  </p:notesMasterIdLst>
   <p:sldIdLst>
-    <p:sldId id="256" r:id="rId7"/>
-    <p:sldId id="257" r:id="rId8"/>
+    <p:sldId id="256" r:id="rId9"/>
+    <p:sldId id="257" r:id="rId10"/>
   </p:sldIdLst>
   <p:sldSz cx="9144000" cy="6858000" type="screen4x3"/>
   <p:notesSz cx="6858000" cy="9144000"/>
@@ -14,7 +17,7 @@
     <a:defPPr>
       <a:defRPr lang="en-US"/>
     </a:defPPr>
-    <a:lvl1pPr marL="0" algn="l" defTabSz="457200" rtl="0" eaLnBrk="1" latinLnBrk="0" hangingPunct="1">
+    <a:lvl1pPr marL="0" algn="l" defTabSz="914400" rtl="0" eaLnBrk="1" latinLnBrk="0" hangingPunct="1">
       <a:defRPr sz="1800" kern="1200">
         <a:solidFill>
           <a:schemeClr val="tx1"/>
@@ -24,7 +27,7 @@
         <a:cs typeface="+mn-cs"/>
       </a:defRPr>
     </a:lvl1pPr>
-    <a:lvl2pPr marL="457200" algn="l" defTabSz="457200" rtl="0" eaLnBrk="1" latinLnBrk="0" hangingPunct="1">
+    <a:lvl2pPr marL="457200" algn="l" defTabSz="914400" rtl="0" eaLnBrk="1" latinLnBrk="0" hangingPunct="1">
       <a:defRPr sz="1800" kern="1200">
         <a:solidFill>
           <a:schemeClr val="tx1"/>
@@ -34,7 +37,7 @@
         <a:cs typeface="+mn-cs"/>
       </a:defRPr>
     </a:lvl2pPr>
-    <a:lvl3pPr marL="914400" algn="l" defTabSz="457200" rtl="0" eaLnBrk="1" latinLnBrk="0" hangingPunct="1">
+    <a:lvl3pPr marL="914400" algn="l" defTabSz="914400" rtl="0" eaLnBrk="1" latinLnBrk="0" hangingPunct="1">
       <a:defRPr sz="1800" kern="1200">
         <a:solidFill>
           <a:schemeClr val="tx1"/>
@@ -44,7 +47,7 @@
         <a:cs typeface="+mn-cs"/>
       </a:defRPr>
     </a:lvl3pPr>
-    <a:lvl4pPr marL="1371600" algn="l" defTabSz="457200" rtl="0" eaLnBrk="1" latinLnBrk="0" hangingPunct="1">
+    <a:lvl4pPr marL="1371600" algn="l" defTabSz="914400" rtl="0" eaLnBrk="1" latinLnBrk="0" hangingPunct="1">
       <a:defRPr sz="1800" kern="1200">
         <a:solidFill>
           <a:schemeClr val="tx1"/>
@@ -54,7 +57,7 @@
         <a:cs typeface="+mn-cs"/>
       </a:defRPr>
     </a:lvl4pPr>
-    <a:lvl5pPr marL="1828800" algn="l" defTabSz="457200" rtl="0" eaLnBrk="1" latinLnBrk="0" hangingPunct="1">
+    <a:lvl5pPr marL="1828800" algn="l" defTabSz="914400" rtl="0" eaLnBrk="1" latinLnBrk="0" hangingPunct="1">
       <a:defRPr sz="1800" kern="1200">
         <a:solidFill>
           <a:schemeClr val="tx1"/>
@@ -64,7 +67,7 @@
         <a:cs typeface="+mn-cs"/>
       </a:defRPr>
     </a:lvl5pPr>
-    <a:lvl6pPr marL="2286000" algn="l" defTabSz="457200" rtl="0" eaLnBrk="1" latinLnBrk="0" hangingPunct="1">
+    <a:lvl6pPr marL="2286000" algn="l" defTabSz="914400" rtl="0" eaLnBrk="1" latinLnBrk="0" hangingPunct="1">
       <a:defRPr sz="1800" kern="1200">
         <a:solidFill>
           <a:schemeClr val="tx1"/>
@@ -74,7 +77,7 @@
         <a:cs typeface="+mn-cs"/>
       </a:defRPr>
     </a:lvl6pPr>
-    <a:lvl7pPr marL="2743200" algn="l" defTabSz="457200" rtl="0" eaLnBrk="1" latinLnBrk="0" hangingPunct="1">
+    <a:lvl7pPr marL="2743200" algn="l" defTabSz="914400" rtl="0" eaLnBrk="1" latinLnBrk="0" hangingPunct="1">
       <a:defRPr sz="1800" kern="1200">
         <a:solidFill>
           <a:schemeClr val="tx1"/>
@@ -84,7 +87,7 @@
         <a:cs typeface="+mn-cs"/>
       </a:defRPr>
     </a:lvl7pPr>
-    <a:lvl8pPr marL="3200400" algn="l" defTabSz="457200" rtl="0" eaLnBrk="1" latinLnBrk="0" hangingPunct="1">
+    <a:lvl8pPr marL="3200400" algn="l" defTabSz="914400" rtl="0" eaLnBrk="1" latinLnBrk="0" hangingPunct="1">
       <a:defRPr sz="1800" kern="1200">
         <a:solidFill>
           <a:schemeClr val="tx1"/>
@@ -94,7 +97,7 @@
         <a:cs typeface="+mn-cs"/>
       </a:defRPr>
     </a:lvl8pPr>
-    <a:lvl9pPr marL="3657600" algn="l" defTabSz="457200" rtl="0" eaLnBrk="1" latinLnBrk="0" hangingPunct="1">
+    <a:lvl9pPr marL="3657600" algn="l" defTabSz="914400" rtl="0" eaLnBrk="1" latinLnBrk="0" hangingPunct="1">
       <a:defRPr sz="1800" kern="1200">
         <a:solidFill>
           <a:schemeClr val="tx1"/>
@@ -106,6 +109,353 @@
     </a:lvl9pPr>
   </p:defaultTextStyle>
 </p:presentation>
+</file>
+
+<file path=ppt/notesMasters/notesMaster1.xml><?xml version="1.0" encoding="utf-8"?>
+<p:notesMaster xmlns:a="http://schemas.openxmlformats.org/drawingml/2006/main" xmlns:r="http://schemas.openxmlformats.org/officeDocument/2006/relationships" xmlns:p="http://schemas.openxmlformats.org/presentationml/2006/main">
+  <p:cSld>
+    <p:bg>
+      <p:bgRef idx="1001">
+        <a:schemeClr val="bg1"/>
+      </p:bgRef>
+    </p:bg>
+    <p:spTree>
+      <p:nvGrpSpPr>
+        <p:cNvPr id="1" name=""/>
+        <p:cNvGrpSpPr/>
+        <p:nvPr/>
+      </p:nvGrpSpPr>
+      <p:grpSpPr>
+        <a:xfrm>
+          <a:off x="0" y="0"/>
+          <a:ext cx="0" cy="0"/>
+          <a:chOff x="0" y="0"/>
+          <a:chExt cx="0" cy="0"/>
+        </a:xfrm>
+      </p:grpSpPr>
+      <p:sp>
+        <p:nvSpPr>
+          <p:cNvPr id="2" name="Header Placeholder 1"/>
+          <p:cNvSpPr>
+            <a:spLocks noGrp="1"/>
+          </p:cNvSpPr>
+          <p:nvPr>
+            <p:ph type="hdr" sz="quarter"/>
+          </p:nvPr>
+        </p:nvSpPr>
+        <p:spPr>
+          <a:xfrm>
+            <a:off x="0" y="0"/>
+            <a:ext cx="2971800" cy="457200"/>
+          </a:xfrm>
+          <a:prstGeom prst="rect">
+            <a:avLst/>
+          </a:prstGeom>
+        </p:spPr>
+        <p:txBody>
+          <a:bodyPr vert="horz" lIns="91440" tIns="45720" rIns="91440" bIns="45720" rtlCol="0"/>
+          <a:lstStyle>
+            <a:lvl1pPr algn="l">
+              <a:defRPr sz="1200"/>
+            </a:lvl1pPr>
+          </a:lstStyle>
+          <a:p>
+            <a:endParaRPr lang="en-US"/>
+          </a:p>
+        </p:txBody>
+      </p:sp>
+      <p:sp>
+        <p:nvSpPr>
+          <p:cNvPr id="3" name="Date Placeholder 2"/>
+          <p:cNvSpPr>
+            <a:spLocks noGrp="1"/>
+          </p:cNvSpPr>
+          <p:nvPr>
+            <p:ph type="dt" idx="1"/>
+          </p:nvPr>
+        </p:nvSpPr>
+        <p:spPr>
+          <a:xfrm>
+            <a:off x="3884613" y="0"/>
+            <a:ext cx="2971800" cy="457200"/>
+          </a:xfrm>
+          <a:prstGeom prst="rect">
+            <a:avLst/>
+          </a:prstGeom>
+        </p:spPr>
+        <p:txBody>
+          <a:bodyPr vert="horz" lIns="91440" tIns="45720" rIns="91440" bIns="45720" rtlCol="0"/>
+          <a:lstStyle>
+            <a:lvl1pPr algn="r">
+              <a:defRPr sz="1200"/>
+            </a:lvl1pPr>
+          </a:lstStyle>
+          <a:p>
+            <a:fld id="{E8DEE278-C0B7-40E7-8A05-17BAAE7291A4}" type="datetimeFigureOut">
+              <a:rPr lang="en-US" smtClean="0"/>
+              <a:t>7/25/2011</a:t>
+            </a:fld>
+            <a:endParaRPr lang="en-US"/>
+          </a:p>
+        </p:txBody>
+      </p:sp>
+      <p:sp>
+        <p:nvSpPr>
+          <p:cNvPr id="4" name="Slide Image Placeholder 3"/>
+          <p:cNvSpPr>
+            <a:spLocks noGrp="1" noRot="1" noChangeAspect="1"/>
+          </p:cNvSpPr>
+          <p:nvPr>
+            <p:ph type="sldImg" idx="2"/>
+          </p:nvPr>
+        </p:nvSpPr>
+        <p:spPr>
+          <a:xfrm>
+            <a:off x="1143000" y="685800"/>
+            <a:ext cx="4572000" cy="3429000"/>
+          </a:xfrm>
+          <a:prstGeom prst="rect">
+            <a:avLst/>
+          </a:prstGeom>
+          <a:noFill/>
+          <a:ln w="12700">
+            <a:solidFill>
+              <a:prstClr val="black"/>
+            </a:solidFill>
+          </a:ln>
+        </p:spPr>
+        <p:txBody>
+          <a:bodyPr vert="horz" lIns="91440" tIns="45720" rIns="91440" bIns="45720" rtlCol="0" anchor="ctr"/>
+          <a:lstStyle/>
+          <a:p>
+            <a:endParaRPr lang="en-US"/>
+          </a:p>
+        </p:txBody>
+      </p:sp>
+      <p:sp>
+        <p:nvSpPr>
+          <p:cNvPr id="5" name="Notes Placeholder 4"/>
+          <p:cNvSpPr>
+            <a:spLocks noGrp="1"/>
+          </p:cNvSpPr>
+          <p:nvPr>
+            <p:ph type="body" sz="quarter" idx="3"/>
+          </p:nvPr>
+        </p:nvSpPr>
+        <p:spPr>
+          <a:xfrm>
+            <a:off x="685800" y="4343400"/>
+            <a:ext cx="5486400" cy="4114800"/>
+          </a:xfrm>
+          <a:prstGeom prst="rect">
+            <a:avLst/>
+          </a:prstGeom>
+        </p:spPr>
+        <p:txBody>
+          <a:bodyPr vert="horz" lIns="91440" tIns="45720" rIns="91440" bIns="45720" rtlCol="0">
+            <a:normAutofit/>
+          </a:bodyPr>
+          <a:lstStyle/>
+          <a:p>
+            <a:pPr lvl="0"/>
+            <a:r>
+              <a:rPr lang="en-US" smtClean="0"/>
+              <a:t>Click to edit Master text styles</a:t>
+            </a:r>
+          </a:p>
+          <a:p>
+            <a:pPr lvl="1"/>
+            <a:r>
+              <a:rPr lang="en-US" smtClean="0"/>
+              <a:t>Second level</a:t>
+            </a:r>
+          </a:p>
+          <a:p>
+            <a:pPr lvl="2"/>
+            <a:r>
+              <a:rPr lang="en-US" smtClean="0"/>
+              <a:t>Third level</a:t>
+            </a:r>
+          </a:p>
+          <a:p>
+            <a:pPr lvl="3"/>
+            <a:r>
+              <a:rPr lang="en-US" smtClean="0"/>
+              <a:t>Fourth level</a:t>
+            </a:r>
+          </a:p>
+          <a:p>
+            <a:pPr lvl="4"/>
+            <a:r>
+              <a:rPr lang="en-US" smtClean="0"/>
+              <a:t>Fifth level</a:t>
+            </a:r>
+            <a:endParaRPr lang="en-US"/>
+          </a:p>
+        </p:txBody>
+      </p:sp>
+      <p:sp>
+        <p:nvSpPr>
+          <p:cNvPr id="6" name="Footer Placeholder 5"/>
+          <p:cNvSpPr>
+            <a:spLocks noGrp="1"/>
+          </p:cNvSpPr>
+          <p:nvPr>
+            <p:ph type="ftr" sz="quarter" idx="4"/>
+          </p:nvPr>
+        </p:nvSpPr>
+        <p:spPr>
+          <a:xfrm>
+            <a:off x="0" y="8685213"/>
+            <a:ext cx="2971800" cy="457200"/>
+          </a:xfrm>
+          <a:prstGeom prst="rect">
+            <a:avLst/>
+          </a:prstGeom>
+        </p:spPr>
+        <p:txBody>
+          <a:bodyPr vert="horz" lIns="91440" tIns="45720" rIns="91440" bIns="45720" rtlCol="0" anchor="b"/>
+          <a:lstStyle>
+            <a:lvl1pPr algn="l">
+              <a:defRPr sz="1200"/>
+            </a:lvl1pPr>
+          </a:lstStyle>
+          <a:p>
+            <a:endParaRPr lang="en-US"/>
+          </a:p>
+        </p:txBody>
+      </p:sp>
+      <p:sp>
+        <p:nvSpPr>
+          <p:cNvPr id="7" name="Slide Number Placeholder 6"/>
+          <p:cNvSpPr>
+            <a:spLocks noGrp="1"/>
+          </p:cNvSpPr>
+          <p:nvPr>
+            <p:ph type="sldNum" sz="quarter" idx="5"/>
+          </p:nvPr>
+        </p:nvSpPr>
+        <p:spPr>
+          <a:xfrm>
+            <a:off x="3884613" y="8685213"/>
+            <a:ext cx="2971800" cy="457200"/>
+          </a:xfrm>
+          <a:prstGeom prst="rect">
+            <a:avLst/>
+          </a:prstGeom>
+        </p:spPr>
+        <p:txBody>
+          <a:bodyPr vert="horz" lIns="91440" tIns="45720" rIns="91440" bIns="45720" rtlCol="0" anchor="b"/>
+          <a:lstStyle>
+            <a:lvl1pPr algn="r">
+              <a:defRPr sz="1200"/>
+            </a:lvl1pPr>
+          </a:lstStyle>
+          <a:p>
+            <a:fld id="{13D86177-B2F3-4F8D-BF39-D59447A62951}" type="slidenum">
+              <a:rPr lang="en-US" smtClean="0"/>
+              <a:t>‹#›</a:t>
+            </a:fld>
+            <a:endParaRPr lang="en-US"/>
+          </a:p>
+        </p:txBody>
+      </p:sp>
+    </p:spTree>
+  </p:cSld>
+  <p:clrMap bg1="lt1" tx1="dk1" bg2="lt2" tx2="dk2" accent1="accent1" accent2="accent2" accent3="accent3" accent4="accent4" accent5="accent5" accent6="accent6" hlink="hlink" folHlink="folHlink"/>
+  <p:notesStyle>
+    <a:lvl1pPr marL="0" algn="l" defTabSz="914400" rtl="0" eaLnBrk="1" latinLnBrk="0" hangingPunct="1">
+      <a:defRPr sz="1200" kern="1200">
+        <a:solidFill>
+          <a:schemeClr val="tx1"/>
+        </a:solidFill>
+        <a:latin typeface="+mn-lt"/>
+        <a:ea typeface="+mn-ea"/>
+        <a:cs typeface="+mn-cs"/>
+      </a:defRPr>
+    </a:lvl1pPr>
+    <a:lvl2pPr marL="457200" algn="l" defTabSz="914400" rtl="0" eaLnBrk="1" latinLnBrk="0" hangingPunct="1">
+      <a:defRPr sz="1200" kern="1200">
+        <a:solidFill>
+          <a:schemeClr val="tx1"/>
+        </a:solidFill>
+        <a:latin typeface="+mn-lt"/>
+        <a:ea typeface="+mn-ea"/>
+        <a:cs typeface="+mn-cs"/>
+      </a:defRPr>
+    </a:lvl2pPr>
+    <a:lvl3pPr marL="914400" algn="l" defTabSz="914400" rtl="0" eaLnBrk="1" latinLnBrk="0" hangingPunct="1">
+      <a:defRPr sz="1200" kern="1200">
+        <a:solidFill>
+          <a:schemeClr val="tx1"/>
+        </a:solidFill>
+        <a:latin typeface="+mn-lt"/>
+        <a:ea typeface="+mn-ea"/>
+        <a:cs typeface="+mn-cs"/>
+      </a:defRPr>
+    </a:lvl3pPr>
+    <a:lvl4pPr marL="1371600" algn="l" defTabSz="914400" rtl="0" eaLnBrk="1" latinLnBrk="0" hangingPunct="1">
+      <a:defRPr sz="1200" kern="1200">
+        <a:solidFill>
+          <a:schemeClr val="tx1"/>
+        </a:solidFill>
+        <a:latin typeface="+mn-lt"/>
+        <a:ea typeface="+mn-ea"/>
+        <a:cs typeface="+mn-cs"/>
+      </a:defRPr>
+    </a:lvl4pPr>
+    <a:lvl5pPr marL="1828800" algn="l" defTabSz="914400" rtl="0" eaLnBrk="1" latinLnBrk="0" hangingPunct="1">
+      <a:defRPr sz="1200" kern="1200">
+        <a:solidFill>
+          <a:schemeClr val="tx1"/>
+        </a:solidFill>
+        <a:latin typeface="+mn-lt"/>
+        <a:ea typeface="+mn-ea"/>
+        <a:cs typeface="+mn-cs"/>
+      </a:defRPr>
+    </a:lvl5pPr>
+    <a:lvl6pPr marL="2286000" algn="l" defTabSz="914400" rtl="0" eaLnBrk="1" latinLnBrk="0" hangingPunct="1">
+      <a:defRPr sz="1200" kern="1200">
+        <a:solidFill>
+          <a:schemeClr val="tx1"/>
+        </a:solidFill>
+        <a:latin typeface="+mn-lt"/>
+        <a:ea typeface="+mn-ea"/>
+        <a:cs typeface="+mn-cs"/>
+      </a:defRPr>
+    </a:lvl6pPr>
+    <a:lvl7pPr marL="2743200" algn="l" defTabSz="914400" rtl="0" eaLnBrk="1" latinLnBrk="0" hangingPunct="1">
+      <a:defRPr sz="1200" kern="1200">
+        <a:solidFill>
+          <a:schemeClr val="tx1"/>
+        </a:solidFill>
+        <a:latin typeface="+mn-lt"/>
+        <a:ea typeface="+mn-ea"/>
+        <a:cs typeface="+mn-cs"/>
+      </a:defRPr>
+    </a:lvl7pPr>
+    <a:lvl8pPr marL="3200400" algn="l" defTabSz="914400" rtl="0" eaLnBrk="1" latinLnBrk="0" hangingPunct="1">
+      <a:defRPr sz="1200" kern="1200">
+        <a:solidFill>
+          <a:schemeClr val="tx1"/>
+        </a:solidFill>
+        <a:latin typeface="+mn-lt"/>
+        <a:ea typeface="+mn-ea"/>
+        <a:cs typeface="+mn-cs"/>
+      </a:defRPr>
+    </a:lvl8pPr>
+    <a:lvl9pPr marL="3657600" algn="l" defTabSz="914400" rtl="0" eaLnBrk="1" latinLnBrk="0" hangingPunct="1">
+      <a:defRPr sz="1200" kern="1200">
+        <a:solidFill>
+          <a:schemeClr val="tx1"/>
+        </a:solidFill>
+        <a:latin typeface="+mn-lt"/>
+        <a:ea typeface="+mn-ea"/>
+        <a:cs typeface="+mn-cs"/>
+      </a:defRPr>
+    </a:lvl9pPr>
+  </p:notesStyle>
+</p:notesMaster>
 </file>
 
 <file path=ppt/slideLayouts/slideLayout1.xml><?xml version="1.0" encoding="utf-8"?>
@@ -287,9 +637,9 @@
           <a:bodyPr/>
           <a:lstStyle/>
           <a:p>
-            <a:fld id="{5BCAD085-E8A6-8845-BD4E-CB4CCA059FC4}" type="datetimeFigureOut">
-              <a:rPr lang="en-US" smtClean="0"/>
-              <a:t>1/27/13</a:t>
+            <a:fld id="{F2127349-39DC-4CF3-A016-764530F31A72}" type="datetimeFigureOut">
+              <a:rPr lang="en-US" smtClean="0"/>
+              <a:t>7/25/2011</a:t>
             </a:fld>
             <a:endParaRPr lang="en-US"/>
           </a:p>
@@ -329,7 +679,7 @@
           <a:bodyPr/>
           <a:lstStyle/>
           <a:p>
-            <a:fld id="{C1FF6DA9-008F-8B48-92A6-B652298478BF}" type="slidenum">
+            <a:fld id="{0588C486-339C-4F7C-9817-3241601B118C}" type="slidenum">
               <a:rPr lang="en-US" smtClean="0"/>
               <a:t>‹#›</a:t>
             </a:fld>
@@ -338,11 +688,6 @@
         </p:txBody>
       </p:sp>
     </p:spTree>
-    <p:extLst>
-      <p:ext uri="{BB962C8B-B14F-4D97-AF65-F5344CB8AC3E}">
-        <p14:creationId xmlns:p14="http://schemas.microsoft.com/office/powerpoint/2010/main" val="3168075583"/>
-      </p:ext>
-    </p:extLst>
   </p:cSld>
   <p:clrMapOvr>
     <a:masterClrMapping/>
@@ -457,9 +802,9 @@
           <a:bodyPr/>
           <a:lstStyle/>
           <a:p>
-            <a:fld id="{5BCAD085-E8A6-8845-BD4E-CB4CCA059FC4}" type="datetimeFigureOut">
-              <a:rPr lang="en-US" smtClean="0"/>
-              <a:t>1/27/13</a:t>
+            <a:fld id="{F2127349-39DC-4CF3-A016-764530F31A72}" type="datetimeFigureOut">
+              <a:rPr lang="en-US" smtClean="0"/>
+              <a:t>7/25/2011</a:t>
             </a:fld>
             <a:endParaRPr lang="en-US"/>
           </a:p>
@@ -499,7 +844,7 @@
           <a:bodyPr/>
           <a:lstStyle/>
           <a:p>
-            <a:fld id="{C1FF6DA9-008F-8B48-92A6-B652298478BF}" type="slidenum">
+            <a:fld id="{0588C486-339C-4F7C-9817-3241601B118C}" type="slidenum">
               <a:rPr lang="en-US" smtClean="0"/>
               <a:t>‹#›</a:t>
             </a:fld>
@@ -508,11 +853,6 @@
         </p:txBody>
       </p:sp>
     </p:spTree>
-    <p:extLst>
-      <p:ext uri="{BB962C8B-B14F-4D97-AF65-F5344CB8AC3E}">
-        <p14:creationId xmlns:p14="http://schemas.microsoft.com/office/powerpoint/2010/main" val="2910927964"/>
-      </p:ext>
-    </p:extLst>
   </p:cSld>
   <p:clrMapOvr>
     <a:masterClrMapping/>
@@ -637,9 +977,9 @@
           <a:bodyPr/>
           <a:lstStyle/>
           <a:p>
-            <a:fld id="{5BCAD085-E8A6-8845-BD4E-CB4CCA059FC4}" type="datetimeFigureOut">
-              <a:rPr lang="en-US" smtClean="0"/>
-              <a:t>1/27/13</a:t>
+            <a:fld id="{F2127349-39DC-4CF3-A016-764530F31A72}" type="datetimeFigureOut">
+              <a:rPr lang="en-US" smtClean="0"/>
+              <a:t>7/25/2011</a:t>
             </a:fld>
             <a:endParaRPr lang="en-US"/>
           </a:p>
@@ -679,7 +1019,7 @@
           <a:bodyPr/>
           <a:lstStyle/>
           <a:p>
-            <a:fld id="{C1FF6DA9-008F-8B48-92A6-B652298478BF}" type="slidenum">
+            <a:fld id="{0588C486-339C-4F7C-9817-3241601B118C}" type="slidenum">
               <a:rPr lang="en-US" smtClean="0"/>
               <a:t>‹#›</a:t>
             </a:fld>
@@ -688,11 +1028,6 @@
         </p:txBody>
       </p:sp>
     </p:spTree>
-    <p:extLst>
-      <p:ext uri="{BB962C8B-B14F-4D97-AF65-F5344CB8AC3E}">
-        <p14:creationId xmlns:p14="http://schemas.microsoft.com/office/powerpoint/2010/main" val="3612223792"/>
-      </p:ext>
-    </p:extLst>
   </p:cSld>
   <p:clrMapOvr>
     <a:masterClrMapping/>
@@ -807,9 +1142,9 @@
           <a:bodyPr/>
           <a:lstStyle/>
           <a:p>
-            <a:fld id="{5BCAD085-E8A6-8845-BD4E-CB4CCA059FC4}" type="datetimeFigureOut">
-              <a:rPr lang="en-US" smtClean="0"/>
-              <a:t>1/27/13</a:t>
+            <a:fld id="{F2127349-39DC-4CF3-A016-764530F31A72}" type="datetimeFigureOut">
+              <a:rPr lang="en-US" smtClean="0"/>
+              <a:t>7/25/2011</a:t>
             </a:fld>
             <a:endParaRPr lang="en-US"/>
           </a:p>
@@ -849,7 +1184,7 @@
           <a:bodyPr/>
           <a:lstStyle/>
           <a:p>
-            <a:fld id="{C1FF6DA9-008F-8B48-92A6-B652298478BF}" type="slidenum">
+            <a:fld id="{0588C486-339C-4F7C-9817-3241601B118C}" type="slidenum">
               <a:rPr lang="en-US" smtClean="0"/>
               <a:t>‹#›</a:t>
             </a:fld>
@@ -858,11 +1193,6 @@
         </p:txBody>
       </p:sp>
     </p:spTree>
-    <p:extLst>
-      <p:ext uri="{BB962C8B-B14F-4D97-AF65-F5344CB8AC3E}">
-        <p14:creationId xmlns:p14="http://schemas.microsoft.com/office/powerpoint/2010/main" val="2614314258"/>
-      </p:ext>
-    </p:extLst>
   </p:cSld>
   <p:clrMapOvr>
     <a:masterClrMapping/>
@@ -1053,9 +1383,9 @@
           <a:bodyPr/>
           <a:lstStyle/>
           <a:p>
-            <a:fld id="{5BCAD085-E8A6-8845-BD4E-CB4CCA059FC4}" type="datetimeFigureOut">
-              <a:rPr lang="en-US" smtClean="0"/>
-              <a:t>1/27/13</a:t>
+            <a:fld id="{F2127349-39DC-4CF3-A016-764530F31A72}" type="datetimeFigureOut">
+              <a:rPr lang="en-US" smtClean="0"/>
+              <a:t>7/25/2011</a:t>
             </a:fld>
             <a:endParaRPr lang="en-US"/>
           </a:p>
@@ -1095,7 +1425,7 @@
           <a:bodyPr/>
           <a:lstStyle/>
           <a:p>
-            <a:fld id="{C1FF6DA9-008F-8B48-92A6-B652298478BF}" type="slidenum">
+            <a:fld id="{0588C486-339C-4F7C-9817-3241601B118C}" type="slidenum">
               <a:rPr lang="en-US" smtClean="0"/>
               <a:t>‹#›</a:t>
             </a:fld>
@@ -1104,11 +1434,6 @@
         </p:txBody>
       </p:sp>
     </p:spTree>
-    <p:extLst>
-      <p:ext uri="{BB962C8B-B14F-4D97-AF65-F5344CB8AC3E}">
-        <p14:creationId xmlns:p14="http://schemas.microsoft.com/office/powerpoint/2010/main" val="960648375"/>
-      </p:ext>
-    </p:extLst>
   </p:cSld>
   <p:clrMapOvr>
     <a:masterClrMapping/>
@@ -1341,9 +1666,9 @@
           <a:bodyPr/>
           <a:lstStyle/>
           <a:p>
-            <a:fld id="{5BCAD085-E8A6-8845-BD4E-CB4CCA059FC4}" type="datetimeFigureOut">
-              <a:rPr lang="en-US" smtClean="0"/>
-              <a:t>1/27/13</a:t>
+            <a:fld id="{F2127349-39DC-4CF3-A016-764530F31A72}" type="datetimeFigureOut">
+              <a:rPr lang="en-US" smtClean="0"/>
+              <a:t>7/25/2011</a:t>
             </a:fld>
             <a:endParaRPr lang="en-US"/>
           </a:p>
@@ -1383,7 +1708,7 @@
           <a:bodyPr/>
           <a:lstStyle/>
           <a:p>
-            <a:fld id="{C1FF6DA9-008F-8B48-92A6-B652298478BF}" type="slidenum">
+            <a:fld id="{0588C486-339C-4F7C-9817-3241601B118C}" type="slidenum">
               <a:rPr lang="en-US" smtClean="0"/>
               <a:t>‹#›</a:t>
             </a:fld>
@@ -1392,11 +1717,6 @@
         </p:txBody>
       </p:sp>
     </p:spTree>
-    <p:extLst>
-      <p:ext uri="{BB962C8B-B14F-4D97-AF65-F5344CB8AC3E}">
-        <p14:creationId xmlns:p14="http://schemas.microsoft.com/office/powerpoint/2010/main" val="2782244947"/>
-      </p:ext>
-    </p:extLst>
   </p:cSld>
   <p:clrMapOvr>
     <a:masterClrMapping/>
@@ -1763,9 +2083,9 @@
           <a:bodyPr/>
           <a:lstStyle/>
           <a:p>
-            <a:fld id="{5BCAD085-E8A6-8845-BD4E-CB4CCA059FC4}" type="datetimeFigureOut">
-              <a:rPr lang="en-US" smtClean="0"/>
-              <a:t>1/27/13</a:t>
+            <a:fld id="{F2127349-39DC-4CF3-A016-764530F31A72}" type="datetimeFigureOut">
+              <a:rPr lang="en-US" smtClean="0"/>
+              <a:t>7/25/2011</a:t>
             </a:fld>
             <a:endParaRPr lang="en-US"/>
           </a:p>
@@ -1805,7 +2125,7 @@
           <a:bodyPr/>
           <a:lstStyle/>
           <a:p>
-            <a:fld id="{C1FF6DA9-008F-8B48-92A6-B652298478BF}" type="slidenum">
+            <a:fld id="{0588C486-339C-4F7C-9817-3241601B118C}" type="slidenum">
               <a:rPr lang="en-US" smtClean="0"/>
               <a:t>‹#›</a:t>
             </a:fld>
@@ -1814,11 +2134,6 @@
         </p:txBody>
       </p:sp>
     </p:spTree>
-    <p:extLst>
-      <p:ext uri="{BB962C8B-B14F-4D97-AF65-F5344CB8AC3E}">
-        <p14:creationId xmlns:p14="http://schemas.microsoft.com/office/powerpoint/2010/main" val="990158736"/>
-      </p:ext>
-    </p:extLst>
   </p:cSld>
   <p:clrMapOvr>
     <a:masterClrMapping/>
@@ -1881,9 +2196,9 @@
           <a:bodyPr/>
           <a:lstStyle/>
           <a:p>
-            <a:fld id="{5BCAD085-E8A6-8845-BD4E-CB4CCA059FC4}" type="datetimeFigureOut">
-              <a:rPr lang="en-US" smtClean="0"/>
-              <a:t>1/27/13</a:t>
+            <a:fld id="{F2127349-39DC-4CF3-A016-764530F31A72}" type="datetimeFigureOut">
+              <a:rPr lang="en-US" smtClean="0"/>
+              <a:t>7/25/2011</a:t>
             </a:fld>
             <a:endParaRPr lang="en-US"/>
           </a:p>
@@ -1923,7 +2238,7 @@
           <a:bodyPr/>
           <a:lstStyle/>
           <a:p>
-            <a:fld id="{C1FF6DA9-008F-8B48-92A6-B652298478BF}" type="slidenum">
+            <a:fld id="{0588C486-339C-4F7C-9817-3241601B118C}" type="slidenum">
               <a:rPr lang="en-US" smtClean="0"/>
               <a:t>‹#›</a:t>
             </a:fld>
@@ -1932,11 +2247,6 @@
         </p:txBody>
       </p:sp>
     </p:spTree>
-    <p:extLst>
-      <p:ext uri="{BB962C8B-B14F-4D97-AF65-F5344CB8AC3E}">
-        <p14:creationId xmlns:p14="http://schemas.microsoft.com/office/powerpoint/2010/main" val="727027711"/>
-      </p:ext>
-    </p:extLst>
   </p:cSld>
   <p:clrMapOvr>
     <a:masterClrMapping/>
@@ -1976,9 +2286,9 @@
           <a:bodyPr/>
           <a:lstStyle/>
           <a:p>
-            <a:fld id="{5BCAD085-E8A6-8845-BD4E-CB4CCA059FC4}" type="datetimeFigureOut">
-              <a:rPr lang="en-US" smtClean="0"/>
-              <a:t>1/27/13</a:t>
+            <a:fld id="{F2127349-39DC-4CF3-A016-764530F31A72}" type="datetimeFigureOut">
+              <a:rPr lang="en-US" smtClean="0"/>
+              <a:t>7/25/2011</a:t>
             </a:fld>
             <a:endParaRPr lang="en-US"/>
           </a:p>
@@ -2018,7 +2328,7 @@
           <a:bodyPr/>
           <a:lstStyle/>
           <a:p>
-            <a:fld id="{C1FF6DA9-008F-8B48-92A6-B652298478BF}" type="slidenum">
+            <a:fld id="{0588C486-339C-4F7C-9817-3241601B118C}" type="slidenum">
               <a:rPr lang="en-US" smtClean="0"/>
               <a:t>‹#›</a:t>
             </a:fld>
@@ -2027,11 +2337,6 @@
         </p:txBody>
       </p:sp>
     </p:spTree>
-    <p:extLst>
-      <p:ext uri="{BB962C8B-B14F-4D97-AF65-F5344CB8AC3E}">
-        <p14:creationId xmlns:p14="http://schemas.microsoft.com/office/powerpoint/2010/main" val="1212999818"/>
-      </p:ext>
-    </p:extLst>
   </p:cSld>
   <p:clrMapOvr>
     <a:masterClrMapping/>
@@ -2253,9 +2558,9 @@
           <a:bodyPr/>
           <a:lstStyle/>
           <a:p>
-            <a:fld id="{5BCAD085-E8A6-8845-BD4E-CB4CCA059FC4}" type="datetimeFigureOut">
-              <a:rPr lang="en-US" smtClean="0"/>
-              <a:t>1/27/13</a:t>
+            <a:fld id="{F2127349-39DC-4CF3-A016-764530F31A72}" type="datetimeFigureOut">
+              <a:rPr lang="en-US" smtClean="0"/>
+              <a:t>7/25/2011</a:t>
             </a:fld>
             <a:endParaRPr lang="en-US"/>
           </a:p>
@@ -2295,7 +2600,7 @@
           <a:bodyPr/>
           <a:lstStyle/>
           <a:p>
-            <a:fld id="{C1FF6DA9-008F-8B48-92A6-B652298478BF}" type="slidenum">
+            <a:fld id="{0588C486-339C-4F7C-9817-3241601B118C}" type="slidenum">
               <a:rPr lang="en-US" smtClean="0"/>
               <a:t>‹#›</a:t>
             </a:fld>
@@ -2304,11 +2609,6 @@
         </p:txBody>
       </p:sp>
     </p:spTree>
-    <p:extLst>
-      <p:ext uri="{BB962C8B-B14F-4D97-AF65-F5344CB8AC3E}">
-        <p14:creationId xmlns:p14="http://schemas.microsoft.com/office/powerpoint/2010/main" val="1840726560"/>
-      </p:ext>
-    </p:extLst>
   </p:cSld>
   <p:clrMapOvr>
     <a:masterClrMapping/>
@@ -2506,9 +2806,9 @@
           <a:bodyPr/>
           <a:lstStyle/>
           <a:p>
-            <a:fld id="{5BCAD085-E8A6-8845-BD4E-CB4CCA059FC4}" type="datetimeFigureOut">
-              <a:rPr lang="en-US" smtClean="0"/>
-              <a:t>1/27/13</a:t>
+            <a:fld id="{F2127349-39DC-4CF3-A016-764530F31A72}" type="datetimeFigureOut">
+              <a:rPr lang="en-US" smtClean="0"/>
+              <a:t>7/25/2011</a:t>
             </a:fld>
             <a:endParaRPr lang="en-US"/>
           </a:p>
@@ -2548,7 +2848,7 @@
           <a:bodyPr/>
           <a:lstStyle/>
           <a:p>
-            <a:fld id="{C1FF6DA9-008F-8B48-92A6-B652298478BF}" type="slidenum">
+            <a:fld id="{0588C486-339C-4F7C-9817-3241601B118C}" type="slidenum">
               <a:rPr lang="en-US" smtClean="0"/>
               <a:t>‹#›</a:t>
             </a:fld>
@@ -2557,11 +2857,6 @@
         </p:txBody>
       </p:sp>
     </p:spTree>
-    <p:extLst>
-      <p:ext uri="{BB962C8B-B14F-4D97-AF65-F5344CB8AC3E}">
-        <p14:creationId xmlns:p14="http://schemas.microsoft.com/office/powerpoint/2010/main" val="3889236939"/>
-      </p:ext>
-    </p:extLst>
   </p:cSld>
   <p:clrMapOvr>
     <a:masterClrMapping/>
@@ -2719,9 +3014,9 @@
             </a:lvl1pPr>
           </a:lstStyle>
           <a:p>
-            <a:fld id="{5BCAD085-E8A6-8845-BD4E-CB4CCA059FC4}" type="datetimeFigureOut">
-              <a:rPr lang="en-US" smtClean="0"/>
-              <a:t>1/27/13</a:t>
+            <a:fld id="{F2127349-39DC-4CF3-A016-764530F31A72}" type="datetimeFigureOut">
+              <a:rPr lang="en-US" smtClean="0"/>
+              <a:t>7/25/2011</a:t>
             </a:fld>
             <a:endParaRPr lang="en-US"/>
           </a:p>
@@ -2797,7 +3092,7 @@
             </a:lvl1pPr>
           </a:lstStyle>
           <a:p>
-            <a:fld id="{C1FF6DA9-008F-8B48-92A6-B652298478BF}" type="slidenum">
+            <a:fld id="{0588C486-339C-4F7C-9817-3241601B118C}" type="slidenum">
               <a:rPr lang="en-US" smtClean="0"/>
               <a:t>‹#›</a:t>
             </a:fld>
@@ -2806,11 +3101,6 @@
         </p:txBody>
       </p:sp>
     </p:spTree>
-    <p:extLst>
-      <p:ext uri="{BB962C8B-B14F-4D97-AF65-F5344CB8AC3E}">
-        <p14:creationId xmlns:p14="http://schemas.microsoft.com/office/powerpoint/2010/main" val="2209977519"/>
-      </p:ext>
-    </p:extLst>
   </p:cSld>
   <p:clrMap bg1="lt1" tx1="dk1" bg2="lt2" tx2="dk2" accent1="accent1" accent2="accent2" accent3="accent3" accent4="accent4" accent5="accent5" accent6="accent6" hlink="hlink" folHlink="folHlink"/>
   <p:sldLayoutIdLst>
@@ -2828,7 +3118,7 @@
   </p:sldLayoutIdLst>
   <p:txStyles>
     <p:titleStyle>
-      <a:lvl1pPr algn="ctr" defTabSz="457200" rtl="0" eaLnBrk="1" latinLnBrk="0" hangingPunct="1">
+      <a:lvl1pPr algn="ctr" defTabSz="914400" rtl="0" eaLnBrk="1" latinLnBrk="0" hangingPunct="1">
         <a:spcBef>
           <a:spcPct val="0"/>
         </a:spcBef>
@@ -2844,11 +3134,11 @@
       </a:lvl1pPr>
     </p:titleStyle>
     <p:bodyStyle>
-      <a:lvl1pPr marL="342900" indent="-342900" algn="l" defTabSz="457200" rtl="0" eaLnBrk="1" latinLnBrk="0" hangingPunct="1">
+      <a:lvl1pPr marL="342900" indent="-342900" algn="l" defTabSz="914400" rtl="0" eaLnBrk="1" latinLnBrk="0" hangingPunct="1">
         <a:spcBef>
           <a:spcPct val="20000"/>
         </a:spcBef>
-        <a:buFont typeface="Arial"/>
+        <a:buFont typeface="Arial" pitchFamily="34" charset="0"/>
         <a:buChar char="•"/>
         <a:defRPr sz="3200" kern="1200">
           <a:solidFill>
@@ -2859,11 +3149,11 @@
           <a:cs typeface="+mn-cs"/>
         </a:defRPr>
       </a:lvl1pPr>
-      <a:lvl2pPr marL="742950" indent="-285750" algn="l" defTabSz="457200" rtl="0" eaLnBrk="1" latinLnBrk="0" hangingPunct="1">
+      <a:lvl2pPr marL="742950" indent="-285750" algn="l" defTabSz="914400" rtl="0" eaLnBrk="1" latinLnBrk="0" hangingPunct="1">
         <a:spcBef>
           <a:spcPct val="20000"/>
         </a:spcBef>
-        <a:buFont typeface="Arial"/>
+        <a:buFont typeface="Arial" pitchFamily="34" charset="0"/>
         <a:buChar char="–"/>
         <a:defRPr sz="2800" kern="1200">
           <a:solidFill>
@@ -2874,11 +3164,11 @@
           <a:cs typeface="+mn-cs"/>
         </a:defRPr>
       </a:lvl2pPr>
-      <a:lvl3pPr marL="1143000" indent="-228600" algn="l" defTabSz="457200" rtl="0" eaLnBrk="1" latinLnBrk="0" hangingPunct="1">
+      <a:lvl3pPr marL="1143000" indent="-228600" algn="l" defTabSz="914400" rtl="0" eaLnBrk="1" latinLnBrk="0" hangingPunct="1">
         <a:spcBef>
           <a:spcPct val="20000"/>
         </a:spcBef>
-        <a:buFont typeface="Arial"/>
+        <a:buFont typeface="Arial" pitchFamily="34" charset="0"/>
         <a:buChar char="•"/>
         <a:defRPr sz="2400" kern="1200">
           <a:solidFill>
@@ -2889,11 +3179,11 @@
           <a:cs typeface="+mn-cs"/>
         </a:defRPr>
       </a:lvl3pPr>
-      <a:lvl4pPr marL="1600200" indent="-228600" algn="l" defTabSz="457200" rtl="0" eaLnBrk="1" latinLnBrk="0" hangingPunct="1">
+      <a:lvl4pPr marL="1600200" indent="-228600" algn="l" defTabSz="914400" rtl="0" eaLnBrk="1" latinLnBrk="0" hangingPunct="1">
         <a:spcBef>
           <a:spcPct val="20000"/>
         </a:spcBef>
-        <a:buFont typeface="Arial"/>
+        <a:buFont typeface="Arial" pitchFamily="34" charset="0"/>
         <a:buChar char="–"/>
         <a:defRPr sz="2000" kern="1200">
           <a:solidFill>
@@ -2904,11 +3194,11 @@
           <a:cs typeface="+mn-cs"/>
         </a:defRPr>
       </a:lvl4pPr>
-      <a:lvl5pPr marL="2057400" indent="-228600" algn="l" defTabSz="457200" rtl="0" eaLnBrk="1" latinLnBrk="0" hangingPunct="1">
+      <a:lvl5pPr marL="2057400" indent="-228600" algn="l" defTabSz="914400" rtl="0" eaLnBrk="1" latinLnBrk="0" hangingPunct="1">
         <a:spcBef>
           <a:spcPct val="20000"/>
         </a:spcBef>
-        <a:buFont typeface="Arial"/>
+        <a:buFont typeface="Arial" pitchFamily="34" charset="0"/>
         <a:buChar char="»"/>
         <a:defRPr sz="2000" kern="1200">
           <a:solidFill>
@@ -2919,11 +3209,11 @@
           <a:cs typeface="+mn-cs"/>
         </a:defRPr>
       </a:lvl5pPr>
-      <a:lvl6pPr marL="2514600" indent="-228600" algn="l" defTabSz="457200" rtl="0" eaLnBrk="1" latinLnBrk="0" hangingPunct="1">
+      <a:lvl6pPr marL="2514600" indent="-228600" algn="l" defTabSz="914400" rtl="0" eaLnBrk="1" latinLnBrk="0" hangingPunct="1">
         <a:spcBef>
           <a:spcPct val="20000"/>
         </a:spcBef>
-        <a:buFont typeface="Arial"/>
+        <a:buFont typeface="Arial" pitchFamily="34" charset="0"/>
         <a:buChar char="•"/>
         <a:defRPr sz="2000" kern="1200">
           <a:solidFill>
@@ -2934,11 +3224,11 @@
           <a:cs typeface="+mn-cs"/>
         </a:defRPr>
       </a:lvl6pPr>
-      <a:lvl7pPr marL="2971800" indent="-228600" algn="l" defTabSz="457200" rtl="0" eaLnBrk="1" latinLnBrk="0" hangingPunct="1">
+      <a:lvl7pPr marL="2971800" indent="-228600" algn="l" defTabSz="914400" rtl="0" eaLnBrk="1" latinLnBrk="0" hangingPunct="1">
         <a:spcBef>
           <a:spcPct val="20000"/>
         </a:spcBef>
-        <a:buFont typeface="Arial"/>
+        <a:buFont typeface="Arial" pitchFamily="34" charset="0"/>
         <a:buChar char="•"/>
         <a:defRPr sz="2000" kern="1200">
           <a:solidFill>
@@ -2949,11 +3239,11 @@
           <a:cs typeface="+mn-cs"/>
         </a:defRPr>
       </a:lvl7pPr>
-      <a:lvl8pPr marL="3429000" indent="-228600" algn="l" defTabSz="457200" rtl="0" eaLnBrk="1" latinLnBrk="0" hangingPunct="1">
+      <a:lvl8pPr marL="3429000" indent="-228600" algn="l" defTabSz="914400" rtl="0" eaLnBrk="1" latinLnBrk="0" hangingPunct="1">
         <a:spcBef>
           <a:spcPct val="20000"/>
         </a:spcBef>
-        <a:buFont typeface="Arial"/>
+        <a:buFont typeface="Arial" pitchFamily="34" charset="0"/>
         <a:buChar char="•"/>
         <a:defRPr sz="2000" kern="1200">
           <a:solidFill>
@@ -2964,11 +3254,11 @@
           <a:cs typeface="+mn-cs"/>
         </a:defRPr>
       </a:lvl8pPr>
-      <a:lvl9pPr marL="3886200" indent="-228600" algn="l" defTabSz="457200" rtl="0" eaLnBrk="1" latinLnBrk="0" hangingPunct="1">
+      <a:lvl9pPr marL="3886200" indent="-228600" algn="l" defTabSz="914400" rtl="0" eaLnBrk="1" latinLnBrk="0" hangingPunct="1">
         <a:spcBef>
           <a:spcPct val="20000"/>
         </a:spcBef>
-        <a:buFont typeface="Arial"/>
+        <a:buFont typeface="Arial" pitchFamily="34" charset="0"/>
         <a:buChar char="•"/>
         <a:defRPr sz="2000" kern="1200">
           <a:solidFill>
@@ -2984,7 +3274,7 @@
       <a:defPPr>
         <a:defRPr lang="en-US"/>
       </a:defPPr>
-      <a:lvl1pPr marL="0" algn="l" defTabSz="457200" rtl="0" eaLnBrk="1" latinLnBrk="0" hangingPunct="1">
+      <a:lvl1pPr marL="0" algn="l" defTabSz="914400" rtl="0" eaLnBrk="1" latinLnBrk="0" hangingPunct="1">
         <a:defRPr sz="1800" kern="1200">
           <a:solidFill>
             <a:schemeClr val="tx1"/>
@@ -2994,7 +3284,7 @@
           <a:cs typeface="+mn-cs"/>
         </a:defRPr>
       </a:lvl1pPr>
-      <a:lvl2pPr marL="457200" algn="l" defTabSz="457200" rtl="0" eaLnBrk="1" latinLnBrk="0" hangingPunct="1">
+      <a:lvl2pPr marL="457200" algn="l" defTabSz="914400" rtl="0" eaLnBrk="1" latinLnBrk="0" hangingPunct="1">
         <a:defRPr sz="1800" kern="1200">
           <a:solidFill>
             <a:schemeClr val="tx1"/>
@@ -3004,7 +3294,7 @@
           <a:cs typeface="+mn-cs"/>
         </a:defRPr>
       </a:lvl2pPr>
-      <a:lvl3pPr marL="914400" algn="l" defTabSz="457200" rtl="0" eaLnBrk="1" latinLnBrk="0" hangingPunct="1">
+      <a:lvl3pPr marL="914400" algn="l" defTabSz="914400" rtl="0" eaLnBrk="1" latinLnBrk="0" hangingPunct="1">
         <a:defRPr sz="1800" kern="1200">
           <a:solidFill>
             <a:schemeClr val="tx1"/>
@@ -3014,7 +3304,7 @@
           <a:cs typeface="+mn-cs"/>
         </a:defRPr>
       </a:lvl3pPr>
-      <a:lvl4pPr marL="1371600" algn="l" defTabSz="457200" rtl="0" eaLnBrk="1" latinLnBrk="0" hangingPunct="1">
+      <a:lvl4pPr marL="1371600" algn="l" defTabSz="914400" rtl="0" eaLnBrk="1" latinLnBrk="0" hangingPunct="1">
         <a:defRPr sz="1800" kern="1200">
           <a:solidFill>
             <a:schemeClr val="tx1"/>
@@ -3024,7 +3314,7 @@
           <a:cs typeface="+mn-cs"/>
         </a:defRPr>
       </a:lvl4pPr>
-      <a:lvl5pPr marL="1828800" algn="l" defTabSz="457200" rtl="0" eaLnBrk="1" latinLnBrk="0" hangingPunct="1">
+      <a:lvl5pPr marL="1828800" algn="l" defTabSz="914400" rtl="0" eaLnBrk="1" latinLnBrk="0" hangingPunct="1">
         <a:defRPr sz="1800" kern="1200">
           <a:solidFill>
             <a:schemeClr val="tx1"/>
@@ -3034,7 +3324,7 @@
           <a:cs typeface="+mn-cs"/>
         </a:defRPr>
       </a:lvl5pPr>
-      <a:lvl6pPr marL="2286000" algn="l" defTabSz="457200" rtl="0" eaLnBrk="1" latinLnBrk="0" hangingPunct="1">
+      <a:lvl6pPr marL="2286000" algn="l" defTabSz="914400" rtl="0" eaLnBrk="1" latinLnBrk="0" hangingPunct="1">
         <a:defRPr sz="1800" kern="1200">
           <a:solidFill>
             <a:schemeClr val="tx1"/>
@@ -3044,7 +3334,7 @@
           <a:cs typeface="+mn-cs"/>
         </a:defRPr>
       </a:lvl6pPr>
-      <a:lvl7pPr marL="2743200" algn="l" defTabSz="457200" rtl="0" eaLnBrk="1" latinLnBrk="0" hangingPunct="1">
+      <a:lvl7pPr marL="2743200" algn="l" defTabSz="914400" rtl="0" eaLnBrk="1" latinLnBrk="0" hangingPunct="1">
         <a:defRPr sz="1800" kern="1200">
           <a:solidFill>
             <a:schemeClr val="tx1"/>
@@ -3054,7 +3344,7 @@
           <a:cs typeface="+mn-cs"/>
         </a:defRPr>
       </a:lvl7pPr>
-      <a:lvl8pPr marL="3200400" algn="l" defTabSz="457200" rtl="0" eaLnBrk="1" latinLnBrk="0" hangingPunct="1">
+      <a:lvl8pPr marL="3200400" algn="l" defTabSz="914400" rtl="0" eaLnBrk="1" latinLnBrk="0" hangingPunct="1">
         <a:defRPr sz="1800" kern="1200">
           <a:solidFill>
             <a:schemeClr val="tx1"/>
@@ -3064,7 +3354,7 @@
           <a:cs typeface="+mn-cs"/>
         </a:defRPr>
       </a:lvl8pPr>
-      <a:lvl9pPr marL="3657600" algn="l" defTabSz="457200" rtl="0" eaLnBrk="1" latinLnBrk="0" hangingPunct="1">
+      <a:lvl9pPr marL="3657600" algn="l" defTabSz="914400" rtl="0" eaLnBrk="1" latinLnBrk="0" hangingPunct="1">
         <a:defRPr sz="1800" kern="1200">
           <a:solidFill>
             <a:schemeClr val="tx1"/>
@@ -3091,44 +3381,41 @@
       <p:grpSpPr/>
       <p:sp>
         <p:nvSpPr>
-          <p:cNvPr id="2" name="Rectangle 1"/>
-          <p:cNvSpPr/>
-          <p:nvPr/>
-        </p:nvSpPr>
-        <p:spPr>
-          <a:xfrm>
-            <a:off x="457200" y="274638"/>
-            <a:ext cx="8229600" cy="1143000"/>
-          </a:xfrm>
-          <a:prstGeom prst="rect">
-            <a:avLst/>
-          </a:prstGeom>
-        </p:spPr>
-        <p:style>
-          <a:lnRef idx="1">
-            <a:schemeClr val="accent1"/>
-          </a:lnRef>
-          <a:fillRef idx="3">
-            <a:schemeClr val="accent1"/>
-          </a:fillRef>
-          <a:effectRef idx="2">
-            <a:schemeClr val="accent1"/>
-          </a:effectRef>
-          <a:fontRef idx="minor">
-            <a:schemeClr val="lt1"/>
-          </a:fontRef>
-        </p:style>
-        <p:txBody>
-          <a:bodyPr rtlCol="0" anchor="ctr"/>
-          <a:lstStyle/>
-          <a:p>
-            <a:pPr algn="ctr"/>
-          </a:p>
+          <p:cNvPr id="2" name="Title 1"/>
+          <p:cNvSpPr>
+            <a:spLocks noGrp="1"/>
+          </p:cNvSpPr>
+          <p:nvPr>
+            <p:ph type="title"/>
+          </p:nvPr>
+        </p:nvSpPr>
+        <p:spPr/>
+        <p:txBody>
+          <a:bodyPr/>
+          <a:lstStyle/>
+          <a:p/>
+        </p:txBody>
+      </p:sp>
+      <p:sp>
+        <p:nvSpPr>
+          <p:cNvPr id="3" name="Content Placeholder 2"/>
+          <p:cNvSpPr>
+            <a:spLocks noGrp="1"/>
+          </p:cNvSpPr>
+          <p:nvPr>
+            <p:ph type="obj" idx="1"/>
+          </p:nvPr>
+        </p:nvSpPr>
+        <p:spPr/>
+        <p:txBody>
+          <a:bodyPr/>
+          <a:lstStyle/>
+          <a:p/>
         </p:txBody>
       </p:sp>
       <p:pic>
         <p:nvPicPr>
-          <p:cNvPr id="3" name="Picture 2" descr="image1.jpeg"/>
+          <p:cNvPr id="4" name="Picture 3" descr="image1.jpeg"/>
           <p:cNvPicPr>
             <a:picLocks noChangeAspect="1"/>
           </p:cNvPicPr>
@@ -3136,14 +3423,15 @@
         </p:nvPicPr>
         <p:blipFill>
           <a:blip r:embed="rId2"/>
+          <a:srcRect b="31236"/>
           <a:stretch>
             <a:fillRect/>
           </a:stretch>
         </p:blipFill>
         <p:spPr>
           <a:xfrm>
-            <a:off x="1691640" y="-1061992"/>
-            <a:ext cx="5715000" cy="9058182"/>
+            <a:off x="1691640" y="-1061984"/>
+            <a:ext cx="5715000" cy="9058137"/>
           </a:xfrm>
           <a:prstGeom prst="rect">
             <a:avLst/>
@@ -3170,65 +3458,38 @@
       <p:grpSpPr/>
       <p:sp>
         <p:nvSpPr>
-          <p:cNvPr id="2" name="Rectangle 1"/>
-          <p:cNvSpPr/>
-          <p:nvPr/>
-        </p:nvSpPr>
-        <p:spPr>
-          <a:xfrm>
-            <a:off x="457200" y="274638"/>
-            <a:ext cx="8229600" cy="1143000"/>
-          </a:xfrm>
-          <a:prstGeom prst="rect">
-            <a:avLst/>
-          </a:prstGeom>
-        </p:spPr>
-        <p:style>
-          <a:lnRef idx="1">
-            <a:schemeClr val="accent1"/>
-          </a:lnRef>
-          <a:fillRef idx="3">
-            <a:schemeClr val="accent1"/>
-          </a:fillRef>
-          <a:effectRef idx="2">
-            <a:schemeClr val="accent1"/>
-          </a:effectRef>
-          <a:fontRef idx="minor">
-            <a:schemeClr val="lt1"/>
-          </a:fontRef>
-        </p:style>
-        <p:txBody>
-          <a:bodyPr rtlCol="0" anchor="ctr"/>
-          <a:lstStyle/>
-          <a:p>
-            <a:pPr algn="ctr"/>
-          </a:p>
-        </p:txBody>
-      </p:sp>
-      <p:pic>
-        <p:nvPicPr>
-          <p:cNvPr id="3" name="Picture 2" descr="image1.jpeg"/>
-          <p:cNvPicPr>
-            <a:picLocks noChangeAspect="1"/>
-          </p:cNvPicPr>
-          <p:nvPr/>
-        </p:nvPicPr>
-        <p:blipFill>
-          <a:blip r:embed="rId2"/>
-          <a:stretch>
-            <a:fillRect/>
-          </a:stretch>
-        </p:blipFill>
-        <p:spPr>
-          <a:xfrm>
-            <a:off x="-2590800" y="3276599"/>
-            <a:ext cx="5715000" cy="381000"/>
-          </a:xfrm>
-          <a:prstGeom prst="rect">
-            <a:avLst/>
-          </a:prstGeom>
-        </p:spPr>
-      </p:pic>
+          <p:cNvPr id="2" name="Title 1"/>
+          <p:cNvSpPr>
+            <a:spLocks noGrp="1"/>
+          </p:cNvSpPr>
+          <p:nvPr>
+            <p:ph type="title"/>
+          </p:nvPr>
+        </p:nvSpPr>
+        <p:spPr/>
+        <p:txBody>
+          <a:bodyPr/>
+          <a:lstStyle/>
+          <a:p/>
+        </p:txBody>
+      </p:sp>
+      <p:sp>
+        <p:nvSpPr>
+          <p:cNvPr id="3" name="Content Placeholder 2"/>
+          <p:cNvSpPr>
+            <a:spLocks noGrp="1"/>
+          </p:cNvSpPr>
+          <p:nvPr>
+            <p:ph type="obj" idx="1"/>
+          </p:nvPr>
+        </p:nvSpPr>
+        <p:spPr/>
+        <p:txBody>
+          <a:bodyPr/>
+          <a:lstStyle/>
+          <a:p/>
+        </p:txBody>
+      </p:sp>
       <p:pic>
         <p:nvPicPr>
           <p:cNvPr id="4" name="Picture 3" descr="image1.jpeg"/>
@@ -3238,15 +3499,41 @@
           <p:nvPr/>
         </p:nvPicPr>
         <p:blipFill>
-          <a:blip r:embed="rId3"/>
+          <a:blip r:embed="rId2"/>
+          <a:srcRect b="97108"/>
           <a:stretch>
             <a:fillRect/>
           </a:stretch>
         </p:blipFill>
         <p:spPr>
           <a:xfrm>
-            <a:off x="-195263" y="1338264"/>
-            <a:ext cx="5715000" cy="4257673"/>
+            <a:off x="-2590769" y="3276569"/>
+            <a:ext cx="5715000" cy="381030"/>
+          </a:xfrm>
+          <a:prstGeom prst="rect">
+            <a:avLst/>
+          </a:prstGeom>
+        </p:spPr>
+      </p:pic>
+      <p:pic>
+        <p:nvPicPr>
+          <p:cNvPr id="5" name="Picture 4" descr="image1.jpeg"/>
+          <p:cNvPicPr>
+            <a:picLocks noChangeAspect="1"/>
+          </p:cNvPicPr>
+          <p:nvPr/>
+        </p:nvPicPr>
+        <p:blipFill>
+          <a:blip r:embed="rId3"/>
+          <a:srcRect t="67679"/>
+          <a:stretch>
+            <a:fillRect/>
+          </a:stretch>
+        </p:blipFill>
+        <p:spPr>
+          <a:xfrm>
+            <a:off x="-195224" y="1338224"/>
+            <a:ext cx="5715000" cy="4257629"/>
           </a:xfrm>
           <a:prstGeom prst="rect">
             <a:avLst/>
@@ -3336,7 +3623,6 @@
         <a:font script="Mong" typeface="Mongolian Baiti"/>
         <a:font script="Viet" typeface="Times New Roman"/>
         <a:font script="Uigh" typeface="Microsoft Uighur"/>
-        <a:font script="Geor" typeface="Sylfaen"/>
       </a:majorFont>
       <a:minorFont>
         <a:latin typeface="Calibri"/>
@@ -3371,7 +3657,6 @@
         <a:font script="Mong" typeface="Mongolian Baiti"/>
         <a:font script="Viet" typeface="Arial"/>
         <a:font script="Uigh" typeface="Microsoft Uighur"/>
-        <a:font script="Geor" typeface="Sylfaen"/>
       </a:minorFont>
     </a:fontScheme>
     <a:fmtScheme name="Office">
@@ -3406,16 +3691,20 @@
           <a:gsLst>
             <a:gs pos="0">
               <a:schemeClr val="phClr">
-                <a:tint val="100000"/>
-                <a:shade val="100000"/>
+                <a:shade val="51000"/>
+                <a:satMod val="130000"/>
+              </a:schemeClr>
+            </a:gs>
+            <a:gs pos="80000">
+              <a:schemeClr val="phClr">
+                <a:shade val="93000"/>
                 <a:satMod val="130000"/>
               </a:schemeClr>
             </a:gs>
             <a:gs pos="100000">
               <a:schemeClr val="phClr">
-                <a:tint val="50000"/>
-                <a:shade val="100000"/>
-                <a:satMod val="350000"/>
+                <a:shade val="94000"/>
+                <a:satMod val="135000"/>
               </a:schemeClr>
             </a:gs>
           </a:gsLst>
@@ -3537,46 +3826,290 @@
       </a:bgFillStyleLst>
     </a:fmtScheme>
   </a:themeElements>
-  <a:objectDefaults>
-    <a:spDef>
-      <a:spPr/>
-      <a:bodyPr/>
-      <a:lstStyle/>
-      <a:style>
-        <a:lnRef idx="1">
-          <a:schemeClr val="accent1"/>
-        </a:lnRef>
-        <a:fillRef idx="3">
-          <a:schemeClr val="accent1"/>
-        </a:fillRef>
-        <a:effectRef idx="2">
-          <a:schemeClr val="accent1"/>
-        </a:effectRef>
-        <a:fontRef idx="minor">
-          <a:schemeClr val="lt1"/>
-        </a:fontRef>
-      </a:style>
-    </a:spDef>
-    <a:lnDef>
-      <a:spPr/>
-      <a:bodyPr/>
-      <a:lstStyle/>
-      <a:style>
-        <a:lnRef idx="2">
-          <a:schemeClr val="accent1"/>
-        </a:lnRef>
-        <a:fillRef idx="0">
-          <a:schemeClr val="accent1"/>
-        </a:fillRef>
-        <a:effectRef idx="1">
-          <a:schemeClr val="accent1"/>
-        </a:effectRef>
-        <a:fontRef idx="minor">
-          <a:schemeClr val="tx1"/>
-        </a:fontRef>
-      </a:style>
-    </a:lnDef>
-  </a:objectDefaults>
+  <a:objectDefaults/>
+  <a:extraClrSchemeLst/>
+</a:theme>
+</file>
+
+<file path=ppt/theme/theme2.xml><?xml version="1.0" encoding="utf-8"?>
+<a:theme xmlns:a="http://schemas.openxmlformats.org/drawingml/2006/main" name="Office Theme">
+  <a:themeElements>
+    <a:clrScheme name="Office">
+      <a:dk1>
+        <a:sysClr val="windowText" lastClr="000000"/>
+      </a:dk1>
+      <a:lt1>
+        <a:sysClr val="window" lastClr="FFFFFF"/>
+      </a:lt1>
+      <a:dk2>
+        <a:srgbClr val="1F497D"/>
+      </a:dk2>
+      <a:lt2>
+        <a:srgbClr val="EEECE1"/>
+      </a:lt2>
+      <a:accent1>
+        <a:srgbClr val="4F81BD"/>
+      </a:accent1>
+      <a:accent2>
+        <a:srgbClr val="C0504D"/>
+      </a:accent2>
+      <a:accent3>
+        <a:srgbClr val="9BBB59"/>
+      </a:accent3>
+      <a:accent4>
+        <a:srgbClr val="8064A2"/>
+      </a:accent4>
+      <a:accent5>
+        <a:srgbClr val="4BACC6"/>
+      </a:accent5>
+      <a:accent6>
+        <a:srgbClr val="F79646"/>
+      </a:accent6>
+      <a:hlink>
+        <a:srgbClr val="0000FF"/>
+      </a:hlink>
+      <a:folHlink>
+        <a:srgbClr val="800080"/>
+      </a:folHlink>
+    </a:clrScheme>
+    <a:fontScheme name="Office">
+      <a:majorFont>
+        <a:latin typeface="Calibri"/>
+        <a:ea typeface=""/>
+        <a:cs typeface=""/>
+        <a:font script="Jpan" typeface="ＭＳ Ｐゴシック"/>
+        <a:font script="Hang" typeface="맑은 고딕"/>
+        <a:font script="Hans" typeface="宋体"/>
+        <a:font script="Hant" typeface="新細明體"/>
+        <a:font script="Arab" typeface="Times New Roman"/>
+        <a:font script="Hebr" typeface="Times New Roman"/>
+        <a:font script="Thai" typeface="Angsana New"/>
+        <a:font script="Ethi" typeface="Nyala"/>
+        <a:font script="Beng" typeface="Vrinda"/>
+        <a:font script="Gujr" typeface="Shruti"/>
+        <a:font script="Khmr" typeface="MoolBoran"/>
+        <a:font script="Knda" typeface="Tunga"/>
+        <a:font script="Guru" typeface="Raavi"/>
+        <a:font script="Cans" typeface="Euphemia"/>
+        <a:font script="Cher" typeface="Plantagenet Cherokee"/>
+        <a:font script="Yiii" typeface="Microsoft Yi Baiti"/>
+        <a:font script="Tibt" typeface="Microsoft Himalaya"/>
+        <a:font script="Thaa" typeface="MV Boli"/>
+        <a:font script="Deva" typeface="Mangal"/>
+        <a:font script="Telu" typeface="Gautami"/>
+        <a:font script="Taml" typeface="Latha"/>
+        <a:font script="Syrc" typeface="Estrangelo Edessa"/>
+        <a:font script="Orya" typeface="Kalinga"/>
+        <a:font script="Mlym" typeface="Kartika"/>
+        <a:font script="Laoo" typeface="DokChampa"/>
+        <a:font script="Sinh" typeface="Iskoola Pota"/>
+        <a:font script="Mong" typeface="Mongolian Baiti"/>
+        <a:font script="Viet" typeface="Times New Roman"/>
+        <a:font script="Uigh" typeface="Microsoft Uighur"/>
+      </a:majorFont>
+      <a:minorFont>
+        <a:latin typeface="Calibri"/>
+        <a:ea typeface=""/>
+        <a:cs typeface=""/>
+        <a:font script="Jpan" typeface="ＭＳ Ｐゴシック"/>
+        <a:font script="Hang" typeface="맑은 고딕"/>
+        <a:font script="Hans" typeface="宋体"/>
+        <a:font script="Hant" typeface="新細明體"/>
+        <a:font script="Arab" typeface="Arial"/>
+        <a:font script="Hebr" typeface="Arial"/>
+        <a:font script="Thai" typeface="Cordia New"/>
+        <a:font script="Ethi" typeface="Nyala"/>
+        <a:font script="Beng" typeface="Vrinda"/>
+        <a:font script="Gujr" typeface="Shruti"/>
+        <a:font script="Khmr" typeface="DaunPenh"/>
+        <a:font script="Knda" typeface="Tunga"/>
+        <a:font script="Guru" typeface="Raavi"/>
+        <a:font script="Cans" typeface="Euphemia"/>
+        <a:font script="Cher" typeface="Plantagenet Cherokee"/>
+        <a:font script="Yiii" typeface="Microsoft Yi Baiti"/>
+        <a:font script="Tibt" typeface="Microsoft Himalaya"/>
+        <a:font script="Thaa" typeface="MV Boli"/>
+        <a:font script="Deva" typeface="Mangal"/>
+        <a:font script="Telu" typeface="Gautami"/>
+        <a:font script="Taml" typeface="Latha"/>
+        <a:font script="Syrc" typeface="Estrangelo Edessa"/>
+        <a:font script="Orya" typeface="Kalinga"/>
+        <a:font script="Mlym" typeface="Kartika"/>
+        <a:font script="Laoo" typeface="DokChampa"/>
+        <a:font script="Sinh" typeface="Iskoola Pota"/>
+        <a:font script="Mong" typeface="Mongolian Baiti"/>
+        <a:font script="Viet" typeface="Arial"/>
+        <a:font script="Uigh" typeface="Microsoft Uighur"/>
+      </a:minorFont>
+    </a:fontScheme>
+    <a:fmtScheme name="Office">
+      <a:fillStyleLst>
+        <a:solidFill>
+          <a:schemeClr val="phClr"/>
+        </a:solidFill>
+        <a:gradFill rotWithShape="1">
+          <a:gsLst>
+            <a:gs pos="0">
+              <a:schemeClr val="phClr">
+                <a:tint val="50000"/>
+                <a:satMod val="300000"/>
+              </a:schemeClr>
+            </a:gs>
+            <a:gs pos="35000">
+              <a:schemeClr val="phClr">
+                <a:tint val="37000"/>
+                <a:satMod val="300000"/>
+              </a:schemeClr>
+            </a:gs>
+            <a:gs pos="100000">
+              <a:schemeClr val="phClr">
+                <a:tint val="15000"/>
+                <a:satMod val="350000"/>
+              </a:schemeClr>
+            </a:gs>
+          </a:gsLst>
+          <a:lin ang="16200000" scaled="1"/>
+        </a:gradFill>
+        <a:gradFill rotWithShape="1">
+          <a:gsLst>
+            <a:gs pos="0">
+              <a:schemeClr val="phClr">
+                <a:shade val="51000"/>
+                <a:satMod val="130000"/>
+              </a:schemeClr>
+            </a:gs>
+            <a:gs pos="80000">
+              <a:schemeClr val="phClr">
+                <a:shade val="93000"/>
+                <a:satMod val="130000"/>
+              </a:schemeClr>
+            </a:gs>
+            <a:gs pos="100000">
+              <a:schemeClr val="phClr">
+                <a:shade val="94000"/>
+                <a:satMod val="135000"/>
+              </a:schemeClr>
+            </a:gs>
+          </a:gsLst>
+          <a:lin ang="16200000" scaled="0"/>
+        </a:gradFill>
+      </a:fillStyleLst>
+      <a:lnStyleLst>
+        <a:ln w="9525" cap="flat" cmpd="sng" algn="ctr">
+          <a:solidFill>
+            <a:schemeClr val="phClr">
+              <a:shade val="95000"/>
+              <a:satMod val="105000"/>
+            </a:schemeClr>
+          </a:solidFill>
+          <a:prstDash val="solid"/>
+        </a:ln>
+        <a:ln w="25400" cap="flat" cmpd="sng" algn="ctr">
+          <a:solidFill>
+            <a:schemeClr val="phClr"/>
+          </a:solidFill>
+          <a:prstDash val="solid"/>
+        </a:ln>
+        <a:ln w="38100" cap="flat" cmpd="sng" algn="ctr">
+          <a:solidFill>
+            <a:schemeClr val="phClr"/>
+          </a:solidFill>
+          <a:prstDash val="solid"/>
+        </a:ln>
+      </a:lnStyleLst>
+      <a:effectStyleLst>
+        <a:effectStyle>
+          <a:effectLst>
+            <a:outerShdw blurRad="40000" dist="20000" dir="5400000" rotWithShape="0">
+              <a:srgbClr val="000000">
+                <a:alpha val="38000"/>
+              </a:srgbClr>
+            </a:outerShdw>
+          </a:effectLst>
+        </a:effectStyle>
+        <a:effectStyle>
+          <a:effectLst>
+            <a:outerShdw blurRad="40000" dist="23000" dir="5400000" rotWithShape="0">
+              <a:srgbClr val="000000">
+                <a:alpha val="35000"/>
+              </a:srgbClr>
+            </a:outerShdw>
+          </a:effectLst>
+        </a:effectStyle>
+        <a:effectStyle>
+          <a:effectLst>
+            <a:outerShdw blurRad="40000" dist="23000" dir="5400000" rotWithShape="0">
+              <a:srgbClr val="000000">
+                <a:alpha val="35000"/>
+              </a:srgbClr>
+            </a:outerShdw>
+          </a:effectLst>
+          <a:scene3d>
+            <a:camera prst="orthographicFront">
+              <a:rot lat="0" lon="0" rev="0"/>
+            </a:camera>
+            <a:lightRig rig="threePt" dir="t">
+              <a:rot lat="0" lon="0" rev="1200000"/>
+            </a:lightRig>
+          </a:scene3d>
+          <a:sp3d>
+            <a:bevelT w="63500" h="25400"/>
+          </a:sp3d>
+        </a:effectStyle>
+      </a:effectStyleLst>
+      <a:bgFillStyleLst>
+        <a:solidFill>
+          <a:schemeClr val="phClr"/>
+        </a:solidFill>
+        <a:gradFill rotWithShape="1">
+          <a:gsLst>
+            <a:gs pos="0">
+              <a:schemeClr val="phClr">
+                <a:tint val="40000"/>
+                <a:satMod val="350000"/>
+              </a:schemeClr>
+            </a:gs>
+            <a:gs pos="40000">
+              <a:schemeClr val="phClr">
+                <a:tint val="45000"/>
+                <a:shade val="99000"/>
+                <a:satMod val="350000"/>
+              </a:schemeClr>
+            </a:gs>
+            <a:gs pos="100000">
+              <a:schemeClr val="phClr">
+                <a:shade val="20000"/>
+                <a:satMod val="255000"/>
+              </a:schemeClr>
+            </a:gs>
+          </a:gsLst>
+          <a:path path="circle">
+            <a:fillToRect l="50000" t="-80000" r="50000" b="180000"/>
+          </a:path>
+        </a:gradFill>
+        <a:gradFill rotWithShape="1">
+          <a:gsLst>
+            <a:gs pos="0">
+              <a:schemeClr val="phClr">
+                <a:tint val="80000"/>
+                <a:satMod val="300000"/>
+              </a:schemeClr>
+            </a:gs>
+            <a:gs pos="100000">
+              <a:schemeClr val="phClr">
+                <a:shade val="30000"/>
+                <a:satMod val="200000"/>
+              </a:schemeClr>
+            </a:gs>
+          </a:gsLst>
+          <a:path path="circle">
+            <a:fillToRect l="50000" t="50000" r="50000" b="50000"/>
+          </a:path>
+        </a:gradFill>
+      </a:bgFillStyleLst>
+    </a:fmtScheme>
+  </a:themeElements>
+  <a:objectDefaults/>
   <a:extraClrSchemeLst/>
 </a:theme>
 </file>